--- a/cst4714_weeks1_7_review_with_script.pptx
+++ b/cst4714_weeks1_7_review_with_script.pptx
@@ -678,6 +678,12 @@
           <a:p>
             <a:r>
               <a:t>The Sentry reading matters because it shows why PostgreSQL maintenance is not just housekeeping. Transaction IDs are finite. If old rows are not cleaned up properly and the system approaches wraparound danger, PostgreSQL may stop accepting writes. It does that to protect correctness.</a:t>
+            </a:r>
+          </a:p>
+          <a:p/>
+          <a:p>
+            <a:r>
+              <a:t>The exact article URL for this activity is https://blog.sentry.io/transaction-id-wraparound-in-postgres/</a:t>
             </a:r>
           </a:p>
           <a:p/>
@@ -5533,6 +5539,22 @@
             </a:pPr>
             <a:r>
               <a:t>- Sentry traded some data in one noncritical table for faster recovery</a:t>
+            </a:r>
+          </a:p>
+          <a:p>
+            <a:pPr>
+              <a:spcAft>
+                <a:spcPts val="1000"/>
+              </a:spcAft>
+              <a:defRPr sz="2000">
+                <a:solidFill>
+                  <a:srgbClr val="F5F7FA"/>
+                </a:solidFill>
+                <a:latin typeface="Aptos"/>
+              </a:defRPr>
+            </a:pPr>
+            <a:r>
+              <a:t>- Reading URL: blog.sentry.io/transaction-id-wraparound-in-postgres/</a:t>
             </a:r>
           </a:p>
           <a:p>

--- a/cst4714_weeks1_7_review_with_script.pptx
+++ b/cst4714_weeks1_7_review_with_script.pptx
@@ -675,6 +675,12 @@
         <p:txBody>
           <a:bodyPr/>
           <a:lstStyle/>
+          <a:p>
+            <a:r>
+              <a:t>The Week 7 activity is a hybrid. Students first run safe inspection queries to look at current transaction ID, xid age, dead tuples, and autovacuum signals. Then they connect those observations to the Sentry incident.</a:t>
+            </a:r>
+          </a:p>
+          <a:p/>
           <a:p>
             <a:r>
               <a:t>The Sentry reading matters because it shows why PostgreSQL maintenance is not just housekeeping. Transaction IDs are finite. If old rows are not cleaned up properly and the system approaches wraparound danger, PostgreSQL may stop accepting writes. It does that to protect correctness.</a:t>
@@ -5522,6 +5528,22 @@
               </a:defRPr>
             </a:pPr>
             <a:r>
+              <a:t>- Mini lab: inspect xid age, dead tuples, and autovacuum metadata safely</a:t>
+            </a:r>
+          </a:p>
+          <a:p>
+            <a:pPr>
+              <a:spcAft>
+                <a:spcPts val="1000"/>
+              </a:spcAft>
+              <a:defRPr sz="2000">
+                <a:solidFill>
+                  <a:srgbClr val="F5F7FA"/>
+                </a:solidFill>
+                <a:latin typeface="Aptos"/>
+              </a:defRPr>
+            </a:pPr>
+            <a:r>
               <a:t>- That is a correctness protection, not just a performance slowdown</a:t>
             </a:r>
           </a:p>
@@ -6560,7 +6582,7 @@
               </a:defRPr>
             </a:pPr>
             <a:r>
-              <a:t>- Weeks 6-7: MVCC, vacuum, autovacuum, wraparound, Sentry case study</a:t>
+              <a:t>- Weeks 6-7: MVCC, vacuum, autovacuum, wraparound, inspection lab, Sentry case study</a:t>
             </a:r>
           </a:p>
         </p:txBody>
